--- a/Architecture Diagram and PPT/PPT_Paymentology_AWS_Infrastructure_Demo-Project.pptx
+++ b/Architecture Diagram and PPT/PPT_Paymentology_AWS_Infrastructure_Demo-Project.pptx
@@ -143,10 +143,33 @@
   <pc:docChgLst>
     <pc:chgData name="Sarang Kolhe" userId="859e8abf6002a7cf" providerId="LiveId" clId="{D4EE146E-2816-4990-B1CD-9B7FEEAD54CA}"/>
     <pc:docChg chg="modSld">
-      <pc:chgData name="Sarang Kolhe" userId="859e8abf6002a7cf" providerId="LiveId" clId="{D4EE146E-2816-4990-B1CD-9B7FEEAD54CA}" dt="2026-07-07T08:26:59.108" v="0" actId="20577"/>
+      <pc:chgData name="Sarang Kolhe" userId="859e8abf6002a7cf" providerId="LiveId" clId="{D4EE146E-2816-4990-B1CD-9B7FEEAD54CA}" dt="2026-07-09T19:32:10.008" v="24" actId="20577"/>
       <pc:docMkLst>
         <pc:docMk/>
       </pc:docMkLst>
+      <pc:sldChg chg="modSp mod">
+        <pc:chgData name="Sarang Kolhe" userId="859e8abf6002a7cf" providerId="LiveId" clId="{D4EE146E-2816-4990-B1CD-9B7FEEAD54CA}" dt="2026-07-09T19:32:10.008" v="24" actId="20577"/>
+        <pc:sldMkLst>
+          <pc:docMk/>
+          <pc:sldMk cId="0" sldId="258"/>
+        </pc:sldMkLst>
+        <pc:spChg chg="mod">
+          <ac:chgData name="Sarang Kolhe" userId="859e8abf6002a7cf" providerId="LiveId" clId="{D4EE146E-2816-4990-B1CD-9B7FEEAD54CA}" dt="2026-07-09T19:31:50.316" v="8" actId="20577"/>
+          <ac:spMkLst>
+            <pc:docMk/>
+            <pc:sldMk cId="0" sldId="258"/>
+            <ac:spMk id="19" creationId="{00000000-0000-0000-0000-000000000000}"/>
+          </ac:spMkLst>
+        </pc:spChg>
+        <pc:spChg chg="mod">
+          <ac:chgData name="Sarang Kolhe" userId="859e8abf6002a7cf" providerId="LiveId" clId="{D4EE146E-2816-4990-B1CD-9B7FEEAD54CA}" dt="2026-07-09T19:32:10.008" v="24" actId="20577"/>
+          <ac:spMkLst>
+            <pc:docMk/>
+            <pc:sldMk cId="0" sldId="258"/>
+            <ac:spMk id="20" creationId="{00000000-0000-0000-0000-000000000000}"/>
+          </ac:spMkLst>
+        </pc:spChg>
+      </pc:sldChg>
       <pc:sldChg chg="modSp mod">
         <pc:chgData name="Sarang Kolhe" userId="859e8abf6002a7cf" providerId="LiveId" clId="{D4EE146E-2816-4990-B1CD-9B7FEEAD54CA}" dt="2026-07-07T08:26:59.108" v="0" actId="20577"/>
         <pc:sldMkLst>
@@ -249,7 +272,7 @@
           <a:p>
             <a:fld id="{0072C79E-F689-491D-8A15-7CB3DE0626D4}" type="datetimeFigureOut">
               <a:rPr lang="en-IN" smtClean="0"/>
-              <a:t>07-07-2026</a:t>
+              <a:t>10-07-2026</a:t>
             </a:fld>
             <a:endParaRPr lang="en-IN"/>
           </a:p>
@@ -878,7 +901,7 @@
           <a:p>
             <a:fld id="{5BCAD085-E8A6-8845-BD4E-CB4CCA059FC4}" type="datetimeFigureOut">
               <a:rPr lang="en-US" smtClean="0"/>
-              <a:t>7/7/2026</a:t>
+              <a:t>7/10/2026</a:t>
             </a:fld>
             <a:endParaRPr lang="en-US"/>
           </a:p>
@@ -1046,7 +1069,7 @@
           <a:p>
             <a:fld id="{5BCAD085-E8A6-8845-BD4E-CB4CCA059FC4}" type="datetimeFigureOut">
               <a:rPr lang="en-US" smtClean="0"/>
-              <a:t>7/7/2026</a:t>
+              <a:t>7/10/2026</a:t>
             </a:fld>
             <a:endParaRPr lang="en-US"/>
           </a:p>
@@ -1224,7 +1247,7 @@
           <a:p>
             <a:fld id="{5BCAD085-E8A6-8845-BD4E-CB4CCA059FC4}" type="datetimeFigureOut">
               <a:rPr lang="en-US" smtClean="0"/>
-              <a:t>7/7/2026</a:t>
+              <a:t>7/10/2026</a:t>
             </a:fld>
             <a:endParaRPr lang="en-US"/>
           </a:p>
@@ -1392,7 +1415,7 @@
           <a:p>
             <a:fld id="{5BCAD085-E8A6-8845-BD4E-CB4CCA059FC4}" type="datetimeFigureOut">
               <a:rPr lang="en-US" smtClean="0"/>
-              <a:t>7/7/2026</a:t>
+              <a:t>7/10/2026</a:t>
             </a:fld>
             <a:endParaRPr lang="en-US"/>
           </a:p>
@@ -1637,7 +1660,7 @@
           <a:p>
             <a:fld id="{5BCAD085-E8A6-8845-BD4E-CB4CCA059FC4}" type="datetimeFigureOut">
               <a:rPr lang="en-US" smtClean="0"/>
-              <a:t>7/7/2026</a:t>
+              <a:t>7/10/2026</a:t>
             </a:fld>
             <a:endParaRPr lang="en-US"/>
           </a:p>
@@ -1922,7 +1945,7 @@
           <a:p>
             <a:fld id="{5BCAD085-E8A6-8845-BD4E-CB4CCA059FC4}" type="datetimeFigureOut">
               <a:rPr lang="en-US" smtClean="0"/>
-              <a:t>7/7/2026</a:t>
+              <a:t>7/10/2026</a:t>
             </a:fld>
             <a:endParaRPr lang="en-US"/>
           </a:p>
@@ -2341,7 +2364,7 @@
           <a:p>
             <a:fld id="{5BCAD085-E8A6-8845-BD4E-CB4CCA059FC4}" type="datetimeFigureOut">
               <a:rPr lang="en-US" smtClean="0"/>
-              <a:t>7/7/2026</a:t>
+              <a:t>7/10/2026</a:t>
             </a:fld>
             <a:endParaRPr lang="en-US"/>
           </a:p>
@@ -2458,7 +2481,7 @@
           <a:p>
             <a:fld id="{5BCAD085-E8A6-8845-BD4E-CB4CCA059FC4}" type="datetimeFigureOut">
               <a:rPr lang="en-US" smtClean="0"/>
-              <a:t>7/7/2026</a:t>
+              <a:t>7/10/2026</a:t>
             </a:fld>
             <a:endParaRPr lang="en-US"/>
           </a:p>
@@ -2553,7 +2576,7 @@
           <a:p>
             <a:fld id="{5BCAD085-E8A6-8845-BD4E-CB4CCA059FC4}" type="datetimeFigureOut">
               <a:rPr lang="en-US" smtClean="0"/>
-              <a:t>7/7/2026</a:t>
+              <a:t>7/10/2026</a:t>
             </a:fld>
             <a:endParaRPr lang="en-US"/>
           </a:p>
@@ -2828,7 +2851,7 @@
           <a:p>
             <a:fld id="{5BCAD085-E8A6-8845-BD4E-CB4CCA059FC4}" type="datetimeFigureOut">
               <a:rPr lang="en-US" smtClean="0"/>
-              <a:t>7/7/2026</a:t>
+              <a:t>7/10/2026</a:t>
             </a:fld>
             <a:endParaRPr lang="en-US"/>
           </a:p>
@@ -3080,7 +3103,7 @@
           <a:p>
             <a:fld id="{5BCAD085-E8A6-8845-BD4E-CB4CCA059FC4}" type="datetimeFigureOut">
               <a:rPr lang="en-US" smtClean="0"/>
-              <a:t>7/7/2026</a:t>
+              <a:t>7/10/2026</a:t>
             </a:fld>
             <a:endParaRPr lang="en-US"/>
           </a:p>
@@ -3291,7 +3314,7 @@
           <a:p>
             <a:fld id="{5BCAD085-E8A6-8845-BD4E-CB4CCA059FC4}" type="datetimeFigureOut">
               <a:rPr lang="en-US" smtClean="0"/>
-              <a:t>7/7/2026</a:t>
+              <a:t>7/10/2026</a:t>
             </a:fld>
             <a:endParaRPr lang="en-US"/>
           </a:p>
@@ -10907,7 +10930,7 @@
         <p:spPr>
           <a:xfrm>
             <a:off x="6163056" y="2734056"/>
-            <a:ext cx="2651760" cy="685800"/>
+            <a:ext cx="2651760" cy="615553"/>
           </a:xfrm>
           <a:prstGeom prst="rect">
             <a:avLst/>
@@ -10922,7 +10945,7 @@
           <a:p>
             <a:pPr algn="ctr"/>
             <a:r>
-              <a:rPr sz="4000" b="1">
+              <a:rPr sz="4000" b="1" dirty="0">
                 <a:solidFill>
                   <a:srgbClr val="2F7BE0"/>
                 </a:solidFill>
@@ -10930,6 +10953,21 @@
               </a:rPr>
               <a:t>3</a:t>
             </a:r>
+            <a:r>
+              <a:rPr lang="en-IN" sz="4000" b="1" dirty="0">
+                <a:solidFill>
+                  <a:srgbClr val="2F7BE0"/>
+                </a:solidFill>
+                <a:latin typeface="Segoe UI"/>
+              </a:rPr>
+              <a:t> &amp; 2</a:t>
+            </a:r>
+            <a:endParaRPr sz="4000" b="1" dirty="0">
+              <a:solidFill>
+                <a:srgbClr val="2F7BE0"/>
+              </a:solidFill>
+              <a:latin typeface="Segoe UI"/>
+            </a:endParaRPr>
           </a:p>
         </p:txBody>
       </p:sp>
@@ -10942,7 +10980,7 @@
         <p:spPr>
           <a:xfrm>
             <a:off x="6163056" y="3447288"/>
-            <a:ext cx="2651760" cy="457200"/>
+            <a:ext cx="2651760" cy="369332"/>
           </a:xfrm>
           <a:prstGeom prst="rect">
             <a:avLst/>
@@ -10961,7 +10999,7 @@
               </a:lnSpc>
             </a:pPr>
             <a:r>
-              <a:rPr sz="1200" b="0">
+              <a:rPr sz="1200" b="0" dirty="0">
                 <a:solidFill>
                   <a:srgbClr val="FFFFFF"/>
                 </a:solidFill>
@@ -10969,6 +11007,21 @@
               </a:rPr>
               <a:t>Availability Zones in Production</a:t>
             </a:r>
+            <a:r>
+              <a:rPr lang="en-IN" sz="1200" b="0" dirty="0">
+                <a:solidFill>
+                  <a:srgbClr val="FFFFFF"/>
+                </a:solidFill>
+                <a:latin typeface="Segoe UI"/>
+              </a:rPr>
+              <a:t> &amp; Development</a:t>
+            </a:r>
+            <a:endParaRPr sz="1200" b="0" dirty="0">
+              <a:solidFill>
+                <a:srgbClr val="FFFFFF"/>
+              </a:solidFill>
+              <a:latin typeface="Segoe UI"/>
+            </a:endParaRPr>
           </a:p>
         </p:txBody>
       </p:sp>
